--- a/docs/CIG_Project_Presentation.pptx
+++ b/docs/CIG_Project_Presentation.pptx
@@ -3840,7 +3840,7 @@
               </a:defRPr>
             </a:pPr>
             <a:r>
-              <a:t>Database:  Prisma ORM + SQLite (dev) / PostgreSQL (prod)</a:t>
+              <a:t>Database:  Prisma ORM + SQLite</a:t>
             </a:r>
           </a:p>
           <a:p>
@@ -3886,21 +3886,6 @@
             </a:pPr>
             <a:r>
               <a:t>Auth:      JWT + bcrypt + role middleware</a:t>
-            </a:r>
-          </a:p>
-          <a:p>
-            <a:pPr>
-              <a:spcAft>
-                <a:spcPts val="1000"/>
-              </a:spcAft>
-              <a:defRPr sz="1800">
-                <a:solidFill>
-                  <a:srgbClr val="F8FAFC"/>
-                </a:solidFill>
-              </a:defRPr>
-            </a:pPr>
-            <a:r>
-              <a:t>Deploy:    Render/Railway (API) + Vercel (frontend)</a:t>
             </a:r>
           </a:p>
         </p:txBody>
@@ -5880,7 +5865,7 @@
               </a:defRPr>
             </a:pPr>
             <a:r>
-              <a:t>○ Live deployed demo (Render + Vercel) — in progress</a:t>
+              <a:t>✓ Local working demo (localhost:5173)</a:t>
             </a:r>
           </a:p>
           <a:p>
